--- a/Slides/Semana 16/semana_16_slides.pptx
+++ b/Slides/Semana 16/semana_16_slides.pptx
@@ -21,9 +21,18 @@
     <p:sldId id="269" r:id="rId15"/>
     <p:sldId id="270" r:id="rId16"/>
     <p:sldId id="271" r:id="rId17"/>
+    <p:sldId id="272" r:id="rId18"/>
+    <p:sldId id="273" r:id="rId19"/>
+    <p:sldId id="274" r:id="rId20"/>
+    <p:sldId id="275" r:id="rId21"/>
+    <p:sldId id="276" r:id="rId22"/>
+    <p:sldId id="277" r:id="rId23"/>
+    <p:sldId id="278" r:id="rId24"/>
+    <p:sldId id="279" r:id="rId25"/>
+    <p:sldId id="280" r:id="rId26"/>
   </p:sldIdLst>
   <p:notesMasterIdLst>
-    <p:notesMasterId r:id="rId18"/>
+    <p:notesMasterId r:id="rId27"/>
   </p:notesMasterIdLst>
   <p:sldSz cx="12192000" cy="6858000"/>
   <p:notesSz cx="6858000" cy="12192000"/>
@@ -517,7 +526,7 @@
           <a:p>
             <a:r>
               <a:rPr lang="en-US" dirty="0"/>
-              <a:t>Notas: Abertura da mini aula (20 min). Unidade IV — Otimização e Integração ao Motor. Crítica 🔵 INFORMAL (circulante), sem nota formal nesta semana. Apostila: Parte VI, Cap. 21 — Lightmaps e Iluminação em Motores (abertura de malha para lightmap); Parte VI, Cap. 22 — Integração com Unreal Engine e Unity (importação e configuração); Parte III, Cap. 11 — Shaders, Iluminação e Aparência Final (renderização de modelos texturizados). Mensagem central da capa: até aqui todo o trabalho aconteceu no Blender e no 3D Coat. Hoje o kit inteiro entra, pela primeira vez, em um motor de jogo real. Isso exige duas coisas novas: um segundo canal de UV só para a luz (UV2) e a reconstrução dos mapas PBR já produzidos dentro do sistema de material da Unity. É o ensaio geral da apresentação final (S17). NÃO antecipar a apresentação/defesa nem os critérios formais da CF6 — isso é conteúdo da S17.</a:t>
+              <a:t>Notas: Unidade V — Projeto Final e Apresentação. Crítica 🔴 FORMAL — CF5 / Projeto Final (PF) — todos os 10 critérios da rubrica avaliados com nota simultaneamente pela primeira e única vez no semestre. Apostila: Parte VI, Cap. 24 — Apresentação Profissional de Assets (breakdown visual, portfólio, padrão ArtStation), disponibilizada ao final da Semana 15. Não há conteúdo técnico novo nesta semana: é o encerramento do projeto integrador. Os estudantes chegam com o Kit Modular completo — UV1 validado (S2–4), materiais PBR (S5–8), texturização e bake (S9–12), otimização em atlas/trim (S14) e a fase caminhável montada na Unity com materiais ORM e lightmap baked (S15). A defesa de hoje é o primeiro momento formal em que C8 (Integração na Unity) recebe nota. Autoavaliação (Instrumento 2) já entregue antes da aula, cobrindo os 10 critérios.</a:t>
             </a:r>
             <a:endParaRPr lang="en-US" dirty="0"/>
           </a:p>
@@ -605,7 +614,7 @@
           <a:p>
             <a:r>
               <a:rPr lang="en-US" dirty="0"/>
-              <a:t>Notas: Possíveis Dificuldades nº 3 do plano. O conceito de Roughness (usado desde a S5) é o inverso do de Smoothness (shader Lit da Unity). Estudantes frequentemente conectam o canal sem inverter. Estratégia de mediação: comparar visualmente a superfície na Unity com o render de referência do Blender e perguntar diretamente — "essa superfície deveria ser mais lisa ou mais áspera aqui? O valor que você vê bate com isso?". Se o material parece mais brilhante/opaco que o esperado, o suspeito nº 1 é o Smoothness invertido.</a:t>
+              <a:t>Notas: Tópico 2 da mini aula. "As perguntas de hoje são as mesmas que vocês já responderam nas cinco críticas formais anteriores — só que agora sobre o projeto inteiro. Vocês já treinaram isso a cada duas ou três semanas desde a CF1." Aceitar "não sei, mas acho que..." como resposta válida e observável para C10.</a:t>
             </a:r>
             <a:endParaRPr lang="en-US" dirty="0"/>
           </a:p>
@@ -693,7 +702,7 @@
           <a:p>
             <a:r>
               <a:rPr lang="en-US" dirty="0"/>
-              <a:t>Notas: Possíveis Dificuldades nº 2 e Estratégias de Mediação do plano. Erro silencioso: a textura é importada como imagem comum, o material aceita a conexão sem erro, mas o relevo fica invertido ou achatado. Estratégia: para cada Normal Map importado, conferir no Inspector se a flag "Normal Map" está ativada ANTES de conectar. Quando o normal aparece estranho, este é o primeiro ponto de verificação, antes de investigar qualquer outra causa.</a:t>
+              <a:t>Notas: Tópico 4 da mini aula. A autoavaliação (Instrumento 2) já foi entregue antes da aula e será comparada com a avaliação do professor durante a defesa. É a mesma lógica de justificar decisões praticada desde a Semana 3. A autoavaliação em si já é evidência de C1, independentemente de bater exatamente com a nota final.</a:t>
             </a:r>
             <a:endParaRPr lang="en-US" dirty="0"/>
           </a:p>
@@ -781,7 +790,10 @@
           <a:p>
             <a:r>
               <a:rPr lang="en-US" dirty="0"/>
-              <a:t>Notas: Tópico 4 da mini aula. Para um objeto receber lightmap bake na Unity, ele precisa estar marcado como Static (Contribute GI). O bake calcula a iluminação indireta da cena e a grava no UV2 — por isso o UV2 sem sobreposição é pré-requisito. Analogia do plano: conceitualmente parecido com o bake de Normal Map e AO já feito no Blender (S11–12) — uma informação complexa (luz, ou detalhe de superfície) é calculada uma vez e gravada como textura, para não recalcular em tempo real. Nota do professor: se o bake demorar mais que os 20 min, ter uma cena com bake concluído pronta para mostrar e usar o tempo ao vivo na parte mais transferível (configuração de material + UV2).</a:t>
+              <a:t>Notas: Demonstração de 20 min do plano de aula. "Este é um exemplo de projeto que atingiu nível 4–5 em praticamente todos os critérios da rubrica. Vou passar pelos mesmos pontos que vocês vão apresentar hoje." Se não houver kit de coorte anterior, usar kit de referência próprio ou prints de portfólio profissional (com créditos). Objetivo: calibrar expectativas de forma concreta, não intimidar com padrão inatingível.
+[!FIGURA]
+Objetivo didático: dar à turma um exemplo concreto de nível 4–5 em todos os critérios antes da própria defesa.
+Descrição sugerida: montagem em grade do kit de referência do professor — moodboard, UV layout, material PBR, textura com desgaste, cena Unity final — não há imagem disponível nos assets desta semana; usar material próprio do professor no dia.</a:t>
             </a:r>
             <a:endParaRPr lang="en-US" dirty="0"/>
           </a:p>
@@ -869,7 +881,7 @@
           <a:p>
             <a:r>
               <a:rPr lang="en-US" dirty="0"/>
-              <a:t>Notas: Os erros mais frequentes, das Possíveis Dificuldades do plano (nº 1, 2, 3 e 5). Caçar exatamente estes ao circular no estúdio. Acrescentar mentalmente o nº 4: conferir que o FBX exportou os dois canais de UV, para a Unity não gerar um lightmap UV automático de baixa qualidade em vez do UV2 planejado. Escala: diferenças de unidade entre Blender e Unity — posicionar um objeto de escala conhecida (cubo de 1 m) ao lado e ajustar a escala de importação antes de montar a cena.</a:t>
+              <a:t>Notas: Transição para o bloco de Produção em Estúdio do Encontro 1 (50 min).</a:t>
             </a:r>
             <a:endParaRPr lang="en-US" dirty="0"/>
           </a:p>
@@ -957,7 +969,7 @@
           <a:p>
             <a:r>
               <a:rPr lang="en-US" dirty="0"/>
-              <a:t>Notas: Contextualizar o valor profissional (Fechamento, reflexão de fechamento de unidade). A interoperabilidade entre ferramentas — Blender/3D Coat para produção, Unity como destino — é parte central do trabalho de um artista técnico de jogos. É esperado e normal que a primeira importação de cada estudante tenha ao menos um problema (normal map, smoothness ou lightmap). O objetivo da semana é o primeiro ciclo completo de diagnóstico e correção nesse ambiente novo, não a perfeição na primeira tentativa.</a:t>
+              <a:t>Notas: Atividade estruturada do Encontro 1. Cronômetro visível durante toda a etapa 2. Consigna verbal: "Os primeiros 15 minutos são para ajustes finais... Cada apresentação tem 10 minutos de fala mais 5 minutos de perguntas — o cronômetro vai estar visível para todos."</a:t>
             </a:r>
             <a:endParaRPr lang="en-US" dirty="0"/>
           </a:p>
@@ -1045,7 +1057,7 @@
           <a:p>
             <a:r>
               <a:rPr lang="en-US" dirty="0"/>
-              <a:t>Notas: Amarrar a mini aula antes da demonstração. Cada item retorna na demonstração ao vivo (gerar UV2, exportar, configurar material e primeiro bake) e no estúdio (UV2 + FBX + material de dois assets no 1º encontro; kit completo, cena montada e bake final no 2º encontro). Lembrar: hoje é crítica 🔵 INFORMAL, sem nota formal — mas a cena Unity montada, o lightmap baked e os renders finais compõem a evidência central de C8 (Integração na Unity), avaliada formalmente pela primeira vez na CF6 da S17.</a:t>
+              <a:t>Notas: Papel do professor durante os 5 minutos de perguntas — priorizar perguntas que peçam justificativa técnica ("por que esse valor de roughness aqui?", "o que te fez escolher trim sheet nesse elemento e atlas nesse outro?") em vez de perguntas de sim/não. Manter o cronômetro visível e respeitado — parte da avaliação de C9 é a capacidade de organizar a fala dentro do tempo dado.</a:t>
             </a:r>
             <a:endParaRPr lang="en-US" dirty="0"/>
           </a:p>
@@ -1133,12 +1145,7 @@
           <a:p>
             <a:r>
               <a:rPr lang="en-US" dirty="0"/>
-              <a:t>Notas: Transição para a demonstração de 20 min. Sequência do plano: (1) gerar UV2 no Blender e comparar o layout com o UV1 no UV Editor; (2) exportar FBX confirmando os dois canais de UV e importar na Unity — objeto aparece cinza, retomando o gancho da abertura; (3) criar material no shader Lit, conectar Albedo ao Base Map, Normal Map (ativando a flag antes) e Metallic/Smoothness (invertendo o canal se necessário), comparando com o render de referência do Blender; (4) marcar Static, configurar luz direcional e rodar Generate Lighting, mostrando antes/depois. No estúdio (1º encontro), cada estudante gera o UV2, exporta e configura o material de ao menos dois assets antes de expandir para o kit completo no 2º encontro.
-[!FIGURA]
-Objetivo didático: antecipar o alvo visual da demonstração para que a turma reconheça o resultado esperado antes de produzir no estúdio.
-Arquivo sugerido: assets/demo_blender_unity_pipeline.webp
-Descrição: três painéis em sequência — (1) UV Editor do Blender com o UV2 gerado, ilhas separadas com padding; (2) Inspector da Unity de um Normal Map com a flag "Normal Map" marcada, ao lado do material Lit com os slots preenchidos; (3) a cena com o asset já texturizado sob luz baked, com um antes/depois do lightmap bake.
-Como produzir: no Blender, capturar o UV Editor com o UV2. Na Unity, capturar o Inspector da textura com a flag ativada e o material Lit configurado; rodar Generate Lighting e capturar a viewport antes/depois. Montar os três painéis no Krita, numerados 1–2–3.</a:t>
+              <a:t>Notas: Transição para o Encontro 2 (1h30) — Crítica Coletiva de 20 min (continuação das defesas) e Produção em Estúdio de 60 min.</a:t>
             </a:r>
             <a:endParaRPr lang="en-US" dirty="0"/>
           </a:p>
@@ -1180,6 +1187,270 @@
 </p:notes>
 </file>
 
+<file path=ppt/notesSlides/notesSlide17.xml><?xml version="1.0" encoding="utf-8"?>
+<p:notes xmlns:a="http://schemas.openxmlformats.org/drawingml/2006/main" xmlns:r="http://schemas.openxmlformats.org/officeDocument/2006/relationships" xmlns:p="http://schemas.openxmlformats.org/presentationml/2006/main">
+  <p:cSld>
+    <p:spTree>
+      <p:nvGrpSpPr>
+        <p:cNvPr id="1" name=""/>
+        <p:cNvGrpSpPr/>
+        <p:nvPr/>
+      </p:nvGrpSpPr>
+      <p:grpSpPr>
+        <a:xfrm>
+          <a:off x="0" y="0"/>
+          <a:ext cx="0" cy="0"/>
+          <a:chOff x="0" y="0"/>
+          <a:chExt cx="0" cy="0"/>
+        </a:xfrm>
+      </p:grpSpPr>
+      <p:sp>
+        <p:nvSpPr>
+          <p:cNvPr id="2" name="Slide Image Placeholder 1"/>
+          <p:cNvSpPr>
+            <a:spLocks noGrp="1" noRot="1" noChangeAspect="1"/>
+          </p:cNvSpPr>
+          <p:nvPr>
+            <p:ph type="sldImg"/>
+          </p:nvPr>
+        </p:nvSpPr>
+        <p:spPr/>
+      </p:sp>
+      <p:sp>
+        <p:nvSpPr>
+          <p:cNvPr id="3" name="Notes Placeholder 2"/>
+          <p:cNvSpPr>
+            <a:spLocks noGrp="1"/>
+          </p:cNvSpPr>
+          <p:nvPr>
+            <p:ph type="body" idx="1"/>
+          </p:nvPr>
+        </p:nvSpPr>
+        <p:spPr/>
+        <p:txBody>
+          <a:bodyPr/>
+          <a:lstStyle/>
+          <a:p>
+            <a:r>
+              <a:rPr lang="en-US" dirty="0"/>
+              <a:t>Notas: Estrutura do Encontro 2. "Estamos na reta final das apresentações. Nos próximos 60 minutos, terminamos as defesas restantes e fechamos oficialmente o semestre." Perguntas de mediação recorrentes: "Esse é o mesmo asset que eu vi na Semana 3 com o UV recém-aberto. O que mudou entre aquela versão e essa?" e "Qual desses 10 critérios você sente que foi seu ponto mais forte no semestre? E qual foi o mais desafiador?"</a:t>
+            </a:r>
+            <a:endParaRPr lang="en-US" dirty="0"/>
+          </a:p>
+        </p:txBody>
+      </p:sp>
+      <p:sp>
+        <p:nvSpPr>
+          <p:cNvPr id="4" name="Slide Number Placeholder 3"/>
+          <p:cNvSpPr>
+            <a:spLocks noGrp="1"/>
+          </p:cNvSpPr>
+          <p:nvPr>
+            <p:ph type="sldNum" sz="quarter" idx="10"/>
+          </p:nvPr>
+        </p:nvSpPr>
+        <p:spPr/>
+        <p:txBody>
+          <a:bodyPr/>
+          <a:lstStyle/>
+          <a:p>
+            <a:fld id="{F7021451-1387-4CA6-816F-3879F97B5CBC}" type="slidenum">
+              <a:rPr lang="en-US"/>
+              <a:t>17</a:t>
+            </a:fld>
+            <a:endParaRPr lang="en-US"/>
+          </a:p>
+        </p:txBody>
+      </p:sp>
+    </p:spTree>
+    <p:extLst>
+      <p:ext uri="{BB962C8B-B14F-4D97-AF65-F5344CB8AC3E}">
+        <p14:creationId xmlns:p14="http://schemas.microsoft.com/office/powerpoint/2010/main" val="1024086991"/>
+      </p:ext>
+    </p:extLst>
+  </p:cSld>
+  <p:clrMapOvr>
+    <a:masterClrMapping/>
+  </p:clrMapOvr>
+</p:notes>
+</file>
+
+<file path=ppt/notesSlides/notesSlide18.xml><?xml version="1.0" encoding="utf-8"?>
+<p:notes xmlns:a="http://schemas.openxmlformats.org/drawingml/2006/main" xmlns:r="http://schemas.openxmlformats.org/officeDocument/2006/relationships" xmlns:p="http://schemas.openxmlformats.org/presentationml/2006/main">
+  <p:cSld>
+    <p:spTree>
+      <p:nvGrpSpPr>
+        <p:cNvPr id="1" name=""/>
+        <p:cNvGrpSpPr/>
+        <p:nvPr/>
+      </p:nvGrpSpPr>
+      <p:grpSpPr>
+        <a:xfrm>
+          <a:off x="0" y="0"/>
+          <a:ext cx="0" cy="0"/>
+          <a:chOff x="0" y="0"/>
+          <a:chExt cx="0" cy="0"/>
+        </a:xfrm>
+      </p:grpSpPr>
+      <p:sp>
+        <p:nvSpPr>
+          <p:cNvPr id="2" name="Slide Image Placeholder 1"/>
+          <p:cNvSpPr>
+            <a:spLocks noGrp="1" noRot="1" noChangeAspect="1"/>
+          </p:cNvSpPr>
+          <p:nvPr>
+            <p:ph type="sldImg"/>
+          </p:nvPr>
+        </p:nvSpPr>
+        <p:spPr/>
+      </p:sp>
+      <p:sp>
+        <p:nvSpPr>
+          <p:cNvPr id="3" name="Notes Placeholder 2"/>
+          <p:cNvSpPr>
+            <a:spLocks noGrp="1"/>
+          </p:cNvSpPr>
+          <p:nvPr>
+            <p:ph type="body" idx="1"/>
+          </p:nvPr>
+        </p:nvSpPr>
+        <p:spPr/>
+        <p:txBody>
+          <a:bodyPr/>
+          <a:lstStyle/>
+          <a:p>
+            <a:r>
+              <a:rPr lang="en-US" dirty="0"/>
+              <a:t>Notas: Tabela de entregas do plano de aula. Preparação prévia: confirmar na Semana 15 (ou por comunicado) que cada estudante testou a abertura do próprio projeto Unity e da pasta de entrega — problemas técnicos de última hora não devem consumir tempo da defesa formal.</a:t>
+            </a:r>
+            <a:endParaRPr lang="en-US" dirty="0"/>
+          </a:p>
+        </p:txBody>
+      </p:sp>
+      <p:sp>
+        <p:nvSpPr>
+          <p:cNvPr id="4" name="Slide Number Placeholder 3"/>
+          <p:cNvSpPr>
+            <a:spLocks noGrp="1"/>
+          </p:cNvSpPr>
+          <p:nvPr>
+            <p:ph type="sldNum" sz="quarter" idx="10"/>
+          </p:nvPr>
+        </p:nvSpPr>
+        <p:spPr/>
+        <p:txBody>
+          <a:bodyPr/>
+          <a:lstStyle/>
+          <a:p>
+            <a:fld id="{F7021451-1387-4CA6-816F-3879F97B5CBC}" type="slidenum">
+              <a:rPr lang="en-US"/>
+              <a:t>18</a:t>
+            </a:fld>
+            <a:endParaRPr lang="en-US"/>
+          </a:p>
+        </p:txBody>
+      </p:sp>
+    </p:spTree>
+    <p:extLst>
+      <p:ext uri="{BB962C8B-B14F-4D97-AF65-F5344CB8AC3E}">
+        <p14:creationId xmlns:p14="http://schemas.microsoft.com/office/powerpoint/2010/main" val="1024086991"/>
+      </p:ext>
+    </p:extLst>
+  </p:cSld>
+  <p:clrMapOvr>
+    <a:masterClrMapping/>
+  </p:clrMapOvr>
+</p:notes>
+</file>
+
+<file path=ppt/notesSlides/notesSlide19.xml><?xml version="1.0" encoding="utf-8"?>
+<p:notes xmlns:a="http://schemas.openxmlformats.org/drawingml/2006/main" xmlns:r="http://schemas.openxmlformats.org/officeDocument/2006/relationships" xmlns:p="http://schemas.openxmlformats.org/presentationml/2006/main">
+  <p:cSld>
+    <p:spTree>
+      <p:nvGrpSpPr>
+        <p:cNvPr id="1" name=""/>
+        <p:cNvGrpSpPr/>
+        <p:nvPr/>
+      </p:nvGrpSpPr>
+      <p:grpSpPr>
+        <a:xfrm>
+          <a:off x="0" y="0"/>
+          <a:ext cx="0" cy="0"/>
+          <a:chOff x="0" y="0"/>
+          <a:chExt cx="0" cy="0"/>
+        </a:xfrm>
+      </p:grpSpPr>
+      <p:sp>
+        <p:nvSpPr>
+          <p:cNvPr id="2" name="Slide Image Placeholder 1"/>
+          <p:cNvSpPr>
+            <a:spLocks noGrp="1" noRot="1" noChangeAspect="1"/>
+          </p:cNvSpPr>
+          <p:nvPr>
+            <p:ph type="sldImg"/>
+          </p:nvPr>
+        </p:nvSpPr>
+        <p:spPr/>
+      </p:sp>
+      <p:sp>
+        <p:nvSpPr>
+          <p:cNvPr id="3" name="Notes Placeholder 2"/>
+          <p:cNvSpPr>
+            <a:spLocks noGrp="1"/>
+          </p:cNvSpPr>
+          <p:nvPr>
+            <p:ph type="body" idx="1"/>
+          </p:nvPr>
+        </p:nvSpPr>
+        <p:spPr/>
+        <p:txBody>
+          <a:bodyPr/>
+          <a:lstStyle/>
+          <a:p>
+            <a:r>
+              <a:rPr lang="en-US" dirty="0"/>
+              <a:t>Notas: Três das seis dificuldades do plano de aula, priorizadas por frequência esperada. As demais: divergência entre autoavaliação e nota do professor (tratar como diálogo técnico, não confronto); engajamento desigual dos colegas (a Ficha de Pares também compõe C10 de quem a preenche); tempo insuficiente em turmas maiores (planejar a ordem com antecedência a partir do número real de matriculados).</a:t>
+            </a:r>
+            <a:endParaRPr lang="en-US" dirty="0"/>
+          </a:p>
+        </p:txBody>
+      </p:sp>
+      <p:sp>
+        <p:nvSpPr>
+          <p:cNvPr id="4" name="Slide Number Placeholder 3"/>
+          <p:cNvSpPr>
+            <a:spLocks noGrp="1"/>
+          </p:cNvSpPr>
+          <p:nvPr>
+            <p:ph type="sldNum" sz="quarter" idx="10"/>
+          </p:nvPr>
+        </p:nvSpPr>
+        <p:spPr/>
+        <p:txBody>
+          <a:bodyPr/>
+          <a:lstStyle/>
+          <a:p>
+            <a:fld id="{F7021451-1387-4CA6-816F-3879F97B5CBC}" type="slidenum">
+              <a:rPr lang="en-US"/>
+              <a:t>19</a:t>
+            </a:fld>
+            <a:endParaRPr lang="en-US"/>
+          </a:p>
+        </p:txBody>
+      </p:sp>
+    </p:spTree>
+    <p:extLst>
+      <p:ext uri="{BB962C8B-B14F-4D97-AF65-F5344CB8AC3E}">
+        <p14:creationId xmlns:p14="http://schemas.microsoft.com/office/powerpoint/2010/main" val="1024086991"/>
+      </p:ext>
+    </p:extLst>
+  </p:cSld>
+  <p:clrMapOvr>
+    <a:masterClrMapping/>
+  </p:clrMapOvr>
+</p:notes>
+</file>
+
 <file path=ppt/notesSlides/notesSlide2.xml><?xml version="1.0" encoding="utf-8"?>
 <p:notes xmlns:a="http://schemas.openxmlformats.org/drawingml/2006/main" xmlns:r="http://schemas.openxmlformats.org/officeDocument/2006/relationships" xmlns:p="http://schemas.openxmlformats.org/presentationml/2006/main">
   <p:cSld>
@@ -1226,7 +1497,7 @@
           <a:p>
             <a:r>
               <a:rPr lang="en-US" dirty="0"/>
-              <a:t>Notas: Ler rápido. Os seis objetivos vêm direto do plano de aula (itens 1 a 6). Reforçar: hoje não é técnica nova de pintura nem de otimização — é transporte para o motor. Nada do que foi produzido nas 15 semanas muda; o que muda é o ambiente que lê esses mapas e uma camada de UV nova que nunca foi necessária até agora. Os renders capturados hoje já começam a compor a evidência visual (breakdown) para a apresentação da S17.</a:t>
+              <a:t>Notas: Os seis objetivos vêm direto do plano de aula (itens 1 a 6). Reforçar: nada aqui é técnica nova — é a integração e a comunicação oral de tudo o que já foi produzido. O objetivo 6 (entrega organizada) já é, em si, evidência de C9.</a:t>
             </a:r>
             <a:endParaRPr lang="en-US" dirty="0"/>
           </a:p>
@@ -1268,6 +1539,534 @@
 </p:notes>
 </file>
 
+<file path=ppt/notesSlides/notesSlide20.xml><?xml version="1.0" encoding="utf-8"?>
+<p:notes xmlns:a="http://schemas.openxmlformats.org/drawingml/2006/main" xmlns:r="http://schemas.openxmlformats.org/officeDocument/2006/relationships" xmlns:p="http://schemas.openxmlformats.org/presentationml/2006/main">
+  <p:cSld>
+    <p:spTree>
+      <p:nvGrpSpPr>
+        <p:cNvPr id="1" name=""/>
+        <p:cNvGrpSpPr/>
+        <p:nvPr/>
+      </p:nvGrpSpPr>
+      <p:grpSpPr>
+        <a:xfrm>
+          <a:off x="0" y="0"/>
+          <a:ext cx="0" cy="0"/>
+          <a:chOff x="0" y="0"/>
+          <a:chExt cx="0" cy="0"/>
+        </a:xfrm>
+      </p:grpSpPr>
+      <p:sp>
+        <p:nvSpPr>
+          <p:cNvPr id="2" name="Slide Image Placeholder 1"/>
+          <p:cNvSpPr>
+            <a:spLocks noGrp="1" noRot="1" noChangeAspect="1"/>
+          </p:cNvSpPr>
+          <p:nvPr>
+            <p:ph type="sldImg"/>
+          </p:nvPr>
+        </p:nvSpPr>
+        <p:spPr/>
+      </p:sp>
+      <p:sp>
+        <p:nvSpPr>
+          <p:cNvPr id="3" name="Notes Placeholder 2"/>
+          <p:cNvSpPr>
+            <a:spLocks noGrp="1"/>
+          </p:cNvSpPr>
+          <p:nvPr>
+            <p:ph type="body" idx="1"/>
+          </p:nvPr>
+        </p:nvSpPr>
+        <p:spPr/>
+        <p:txBody>
+          <a:bodyPr/>
+          <a:lstStyle/>
+          <a:p>
+            <a:r>
+              <a:rPr lang="en-US" dirty="0"/>
+              <a:t>Notas: Tabela de Estratégias de Mediação do plano de aula, para consulta rápida do professor durante as duas aulas de defesa.</a:t>
+            </a:r>
+            <a:endParaRPr lang="en-US" dirty="0"/>
+          </a:p>
+        </p:txBody>
+      </p:sp>
+      <p:sp>
+        <p:nvSpPr>
+          <p:cNvPr id="4" name="Slide Number Placeholder 3"/>
+          <p:cNvSpPr>
+            <a:spLocks noGrp="1"/>
+          </p:cNvSpPr>
+          <p:nvPr>
+            <p:ph type="sldNum" sz="quarter" idx="10"/>
+          </p:nvPr>
+        </p:nvSpPr>
+        <p:spPr/>
+        <p:txBody>
+          <a:bodyPr/>
+          <a:lstStyle/>
+          <a:p>
+            <a:fld id="{F7021451-1387-4CA6-816F-3879F97B5CBC}" type="slidenum">
+              <a:rPr lang="en-US"/>
+              <a:t>20</a:t>
+            </a:fld>
+            <a:endParaRPr lang="en-US"/>
+          </a:p>
+        </p:txBody>
+      </p:sp>
+    </p:spTree>
+    <p:extLst>
+      <p:ext uri="{BB962C8B-B14F-4D97-AF65-F5344CB8AC3E}">
+        <p14:creationId xmlns:p14="http://schemas.microsoft.com/office/powerpoint/2010/main" val="1024086991"/>
+      </p:ext>
+    </p:extLst>
+  </p:cSld>
+  <p:clrMapOvr>
+    <a:masterClrMapping/>
+  </p:clrMapOvr>
+</p:notes>
+</file>
+
+<file path=ppt/notesSlides/notesSlide21.xml><?xml version="1.0" encoding="utf-8"?>
+<p:notes xmlns:a="http://schemas.openxmlformats.org/drawingml/2006/main" xmlns:r="http://schemas.openxmlformats.org/officeDocument/2006/relationships" xmlns:p="http://schemas.openxmlformats.org/presentationml/2006/main">
+  <p:cSld>
+    <p:spTree>
+      <p:nvGrpSpPr>
+        <p:cNvPr id="1" name=""/>
+        <p:cNvGrpSpPr/>
+        <p:nvPr/>
+      </p:nvGrpSpPr>
+      <p:grpSpPr>
+        <a:xfrm>
+          <a:off x="0" y="0"/>
+          <a:ext cx="0" cy="0"/>
+          <a:chOff x="0" y="0"/>
+          <a:chExt cx="0" cy="0"/>
+        </a:xfrm>
+      </p:grpSpPr>
+      <p:sp>
+        <p:nvSpPr>
+          <p:cNvPr id="2" name="Slide Image Placeholder 1"/>
+          <p:cNvSpPr>
+            <a:spLocks noGrp="1" noRot="1" noChangeAspect="1"/>
+          </p:cNvSpPr>
+          <p:nvPr>
+            <p:ph type="sldImg"/>
+          </p:nvPr>
+        </p:nvSpPr>
+        <p:spPr/>
+      </p:sp>
+      <p:sp>
+        <p:nvSpPr>
+          <p:cNvPr id="3" name="Notes Placeholder 2"/>
+          <p:cNvSpPr>
+            <a:spLocks noGrp="1"/>
+          </p:cNvSpPr>
+          <p:nvPr>
+            <p:ph type="body" idx="1"/>
+          </p:nvPr>
+        </p:nvSpPr>
+        <p:spPr/>
+        <p:txBody>
+          <a:bodyPr/>
+          <a:lstStyle/>
+          <a:p>
+            <a:r>
+              <a:rPr lang="en-US" dirty="0"/>
+              <a:t>Notas: Pergunta de reflexão semestral do Fechamento (3 min). 2–3 respostas voluntárias. Objetivo: consolidar a metacognição sobre o próprio processo de aprendizagem, não apenas sobre o produto entregue.</a:t>
+            </a:r>
+            <a:endParaRPr lang="en-US" dirty="0"/>
+          </a:p>
+        </p:txBody>
+      </p:sp>
+      <p:sp>
+        <p:nvSpPr>
+          <p:cNvPr id="4" name="Slide Number Placeholder 3"/>
+          <p:cNvSpPr>
+            <a:spLocks noGrp="1"/>
+          </p:cNvSpPr>
+          <p:nvPr>
+            <p:ph type="sldNum" sz="quarter" idx="10"/>
+          </p:nvPr>
+        </p:nvSpPr>
+        <p:spPr/>
+        <p:txBody>
+          <a:bodyPr/>
+          <a:lstStyle/>
+          <a:p>
+            <a:fld id="{F7021451-1387-4CA6-816F-3879F97B5CBC}" type="slidenum">
+              <a:rPr lang="en-US"/>
+              <a:t>21</a:t>
+            </a:fld>
+            <a:endParaRPr lang="en-US"/>
+          </a:p>
+        </p:txBody>
+      </p:sp>
+    </p:spTree>
+    <p:extLst>
+      <p:ext uri="{BB962C8B-B14F-4D97-AF65-F5344CB8AC3E}">
+        <p14:creationId xmlns:p14="http://schemas.microsoft.com/office/powerpoint/2010/main" val="1024086991"/>
+      </p:ext>
+    </p:extLst>
+  </p:cSld>
+  <p:clrMapOvr>
+    <a:masterClrMapping/>
+  </p:clrMapOvr>
+</p:notes>
+</file>
+
+<file path=ppt/notesSlides/notesSlide22.xml><?xml version="1.0" encoding="utf-8"?>
+<p:notes xmlns:a="http://schemas.openxmlformats.org/drawingml/2006/main" xmlns:r="http://schemas.openxmlformats.org/officeDocument/2006/relationships" xmlns:p="http://schemas.openxmlformats.org/presentationml/2006/main">
+  <p:cSld>
+    <p:spTree>
+      <p:nvGrpSpPr>
+        <p:cNvPr id="1" name=""/>
+        <p:cNvGrpSpPr/>
+        <p:nvPr/>
+      </p:nvGrpSpPr>
+      <p:grpSpPr>
+        <a:xfrm>
+          <a:off x="0" y="0"/>
+          <a:ext cx="0" cy="0"/>
+          <a:chOff x="0" y="0"/>
+          <a:chExt cx="0" cy="0"/>
+        </a:xfrm>
+      </p:grpSpPr>
+      <p:sp>
+        <p:nvSpPr>
+          <p:cNvPr id="2" name="Slide Image Placeholder 1"/>
+          <p:cNvSpPr>
+            <a:spLocks noGrp="1" noRot="1" noChangeAspect="1"/>
+          </p:cNvSpPr>
+          <p:nvPr>
+            <p:ph type="sldImg"/>
+          </p:nvPr>
+        </p:nvSpPr>
+        <p:spPr/>
+      </p:sp>
+      <p:sp>
+        <p:nvSpPr>
+          <p:cNvPr id="3" name="Notes Placeholder 2"/>
+          <p:cNvSpPr>
+            <a:spLocks noGrp="1"/>
+          </p:cNvSpPr>
+          <p:nvPr>
+            <p:ph type="body" idx="1"/>
+          </p:nvPr>
+        </p:nvSpPr>
+        <p:spPr/>
+        <p:txBody>
+          <a:bodyPr/>
+          <a:lstStyle/>
+          <a:p>
+            <a:r>
+              <a:rPr lang="en-US" dirty="0"/>
+              <a:t>Notas: Roteiro do Fechamento (10 min) — itens 1 e 3. Encerramento institucional (item 4): informar prazos administrativos remanescentes (lançamento de notas, prazo de recurso, feedback escrito individual, se houver).</a:t>
+            </a:r>
+            <a:endParaRPr lang="en-US" dirty="0"/>
+          </a:p>
+        </p:txBody>
+      </p:sp>
+      <p:sp>
+        <p:nvSpPr>
+          <p:cNvPr id="4" name="Slide Number Placeholder 3"/>
+          <p:cNvSpPr>
+            <a:spLocks noGrp="1"/>
+          </p:cNvSpPr>
+          <p:nvPr>
+            <p:ph type="sldNum" sz="quarter" idx="10"/>
+          </p:nvPr>
+        </p:nvSpPr>
+        <p:spPr/>
+        <p:txBody>
+          <a:bodyPr/>
+          <a:lstStyle/>
+          <a:p>
+            <a:fld id="{F7021451-1387-4CA6-816F-3879F97B5CBC}" type="slidenum">
+              <a:rPr lang="en-US"/>
+              <a:t>22</a:t>
+            </a:fld>
+            <a:endParaRPr lang="en-US"/>
+          </a:p>
+        </p:txBody>
+      </p:sp>
+    </p:spTree>
+    <p:extLst>
+      <p:ext uri="{BB962C8B-B14F-4D97-AF65-F5344CB8AC3E}">
+        <p14:creationId xmlns:p14="http://schemas.microsoft.com/office/powerpoint/2010/main" val="1024086991"/>
+      </p:ext>
+    </p:extLst>
+  </p:cSld>
+  <p:clrMapOvr>
+    <a:masterClrMapping/>
+  </p:clrMapOvr>
+</p:notes>
+</file>
+
+<file path=ppt/notesSlides/notesSlide23.xml><?xml version="1.0" encoding="utf-8"?>
+<p:notes xmlns:a="http://schemas.openxmlformats.org/drawingml/2006/main" xmlns:r="http://schemas.openxmlformats.org/officeDocument/2006/relationships" xmlns:p="http://schemas.openxmlformats.org/presentationml/2006/main">
+  <p:cSld>
+    <p:spTree>
+      <p:nvGrpSpPr>
+        <p:cNvPr id="1" name=""/>
+        <p:cNvGrpSpPr/>
+        <p:nvPr/>
+      </p:nvGrpSpPr>
+      <p:grpSpPr>
+        <a:xfrm>
+          <a:off x="0" y="0"/>
+          <a:ext cx="0" cy="0"/>
+          <a:chOff x="0" y="0"/>
+          <a:chExt cx="0" cy="0"/>
+        </a:xfrm>
+      </p:grpSpPr>
+      <p:sp>
+        <p:nvSpPr>
+          <p:cNvPr id="2" name="Slide Image Placeholder 1"/>
+          <p:cNvSpPr>
+            <a:spLocks noGrp="1" noRot="1" noChangeAspect="1"/>
+          </p:cNvSpPr>
+          <p:nvPr>
+            <p:ph type="sldImg"/>
+          </p:nvPr>
+        </p:nvSpPr>
+        <p:spPr/>
+      </p:sp>
+      <p:sp>
+        <p:nvSpPr>
+          <p:cNvPr id="3" name="Notes Placeholder 2"/>
+          <p:cNvSpPr>
+            <a:spLocks noGrp="1"/>
+          </p:cNvSpPr>
+          <p:nvPr>
+            <p:ph type="body" idx="1"/>
+          </p:nvPr>
+        </p:nvSpPr>
+        <p:spPr/>
+        <p:txBody>
+          <a:bodyPr/>
+          <a:lstStyle/>
+          <a:p>
+            <a:r>
+              <a:rPr lang="en-US" dirty="0"/>
+              <a:t>Notas: Encerramento institucional do plano de aula. Não é uma nova defesa nem uma repetição da CF5 — é atendimento pontual para pendências específicas. Deixar claro que não altera o caráter de "última entrega avaliativa formal" da CF5 de hoje.</a:t>
+            </a:r>
+            <a:endParaRPr lang="en-US" dirty="0"/>
+          </a:p>
+        </p:txBody>
+      </p:sp>
+      <p:sp>
+        <p:nvSpPr>
+          <p:cNvPr id="4" name="Slide Number Placeholder 3"/>
+          <p:cNvSpPr>
+            <a:spLocks noGrp="1"/>
+          </p:cNvSpPr>
+          <p:nvPr>
+            <p:ph type="sldNum" sz="quarter" idx="10"/>
+          </p:nvPr>
+        </p:nvSpPr>
+        <p:spPr/>
+        <p:txBody>
+          <a:bodyPr/>
+          <a:lstStyle/>
+          <a:p>
+            <a:fld id="{F7021451-1387-4CA6-816F-3879F97B5CBC}" type="slidenum">
+              <a:rPr lang="en-US"/>
+              <a:t>23</a:t>
+            </a:fld>
+            <a:endParaRPr lang="en-US"/>
+          </a:p>
+        </p:txBody>
+      </p:sp>
+    </p:spTree>
+    <p:extLst>
+      <p:ext uri="{BB962C8B-B14F-4D97-AF65-F5344CB8AC3E}">
+        <p14:creationId xmlns:p14="http://schemas.microsoft.com/office/powerpoint/2010/main" val="1024086991"/>
+      </p:ext>
+    </p:extLst>
+  </p:cSld>
+  <p:clrMapOvr>
+    <a:masterClrMapping/>
+  </p:clrMapOvr>
+</p:notes>
+</file>
+
+<file path=ppt/notesSlides/notesSlide24.xml><?xml version="1.0" encoding="utf-8"?>
+<p:notes xmlns:a="http://schemas.openxmlformats.org/drawingml/2006/main" xmlns:r="http://schemas.openxmlformats.org/officeDocument/2006/relationships" xmlns:p="http://schemas.openxmlformats.org/presentationml/2006/main">
+  <p:cSld>
+    <p:spTree>
+      <p:nvGrpSpPr>
+        <p:cNvPr id="1" name=""/>
+        <p:cNvGrpSpPr/>
+        <p:nvPr/>
+      </p:nvGrpSpPr>
+      <p:grpSpPr>
+        <a:xfrm>
+          <a:off x="0" y="0"/>
+          <a:ext cx="0" cy="0"/>
+          <a:chOff x="0" y="0"/>
+          <a:chExt cx="0" cy="0"/>
+        </a:xfrm>
+      </p:grpSpPr>
+      <p:sp>
+        <p:nvSpPr>
+          <p:cNvPr id="2" name="Slide Image Placeholder 1"/>
+          <p:cNvSpPr>
+            <a:spLocks noGrp="1" noRot="1" noChangeAspect="1"/>
+          </p:cNvSpPr>
+          <p:nvPr>
+            <p:ph type="sldImg"/>
+          </p:nvPr>
+        </p:nvSpPr>
+        <p:spPr/>
+      </p:sp>
+      <p:sp>
+        <p:nvSpPr>
+          <p:cNvPr id="3" name="Notes Placeholder 2"/>
+          <p:cNvSpPr>
+            <a:spLocks noGrp="1"/>
+          </p:cNvSpPr>
+          <p:nvPr>
+            <p:ph type="body" idx="1"/>
+          </p:nvPr>
+        </p:nvSpPr>
+        <p:spPr/>
+        <p:txBody>
+          <a:bodyPr/>
+          <a:lstStyle/>
+          <a:p>
+            <a:r>
+              <a:rPr lang="en-US" dirty="0"/>
+              <a:t>Notas: Amarrar a mini aula antes da demonstração e da defesa propriamente dita. Todos os pontos retornam ao longo dos dois encontros de defesa.</a:t>
+            </a:r>
+            <a:endParaRPr lang="en-US" dirty="0"/>
+          </a:p>
+        </p:txBody>
+      </p:sp>
+      <p:sp>
+        <p:nvSpPr>
+          <p:cNvPr id="4" name="Slide Number Placeholder 3"/>
+          <p:cNvSpPr>
+            <a:spLocks noGrp="1"/>
+          </p:cNvSpPr>
+          <p:nvPr>
+            <p:ph type="sldNum" sz="quarter" idx="10"/>
+          </p:nvPr>
+        </p:nvSpPr>
+        <p:spPr/>
+        <p:txBody>
+          <a:bodyPr/>
+          <a:lstStyle/>
+          <a:p>
+            <a:fld id="{F7021451-1387-4CA6-816F-3879F97B5CBC}" type="slidenum">
+              <a:rPr lang="en-US"/>
+              <a:t>24</a:t>
+            </a:fld>
+            <a:endParaRPr lang="en-US"/>
+          </a:p>
+        </p:txBody>
+      </p:sp>
+    </p:spTree>
+    <p:extLst>
+      <p:ext uri="{BB962C8B-B14F-4D97-AF65-F5344CB8AC3E}">
+        <p14:creationId xmlns:p14="http://schemas.microsoft.com/office/powerpoint/2010/main" val="1024086991"/>
+      </p:ext>
+    </p:extLst>
+  </p:cSld>
+  <p:clrMapOvr>
+    <a:masterClrMapping/>
+  </p:clrMapOvr>
+</p:notes>
+</file>
+
+<file path=ppt/notesSlides/notesSlide25.xml><?xml version="1.0" encoding="utf-8"?>
+<p:notes xmlns:a="http://schemas.openxmlformats.org/drawingml/2006/main" xmlns:r="http://schemas.openxmlformats.org/officeDocument/2006/relationships" xmlns:p="http://schemas.openxmlformats.org/presentationml/2006/main">
+  <p:cSld>
+    <p:spTree>
+      <p:nvGrpSpPr>
+        <p:cNvPr id="1" name=""/>
+        <p:cNvGrpSpPr/>
+        <p:nvPr/>
+      </p:nvGrpSpPr>
+      <p:grpSpPr>
+        <a:xfrm>
+          <a:off x="0" y="0"/>
+          <a:ext cx="0" cy="0"/>
+          <a:chOff x="0" y="0"/>
+          <a:chExt cx="0" cy="0"/>
+        </a:xfrm>
+      </p:grpSpPr>
+      <p:sp>
+        <p:nvSpPr>
+          <p:cNvPr id="2" name="Slide Image Placeholder 1"/>
+          <p:cNvSpPr>
+            <a:spLocks noGrp="1" noRot="1" noChangeAspect="1"/>
+          </p:cNvSpPr>
+          <p:nvPr>
+            <p:ph type="sldImg"/>
+          </p:nvPr>
+        </p:nvSpPr>
+        <p:spPr/>
+      </p:sp>
+      <p:sp>
+        <p:nvSpPr>
+          <p:cNvPr id="3" name="Notes Placeholder 2"/>
+          <p:cNvSpPr>
+            <a:spLocks noGrp="1"/>
+          </p:cNvSpPr>
+          <p:nvPr>
+            <p:ph type="body" idx="1"/>
+          </p:nvPr>
+        </p:nvSpPr>
+        <p:spPr/>
+        <p:txBody>
+          <a:bodyPr/>
+          <a:lstStyle/>
+          <a:p>
+            <a:r>
+              <a:rPr lang="en-US" dirty="0"/>
+              <a:t>Notas: Última fala do plano de aula (Encerramento institucional). Agradecer o semestre de trabalho e reforçar o valor profissional do que foi produzido, conectando com a leitura obrigatória da semana (Cap. 24 — Apresentação Profissional de Assets, padrão ArtStation).</a:t>
+            </a:r>
+            <a:endParaRPr lang="en-US" dirty="0"/>
+          </a:p>
+        </p:txBody>
+      </p:sp>
+      <p:sp>
+        <p:nvSpPr>
+          <p:cNvPr id="4" name="Slide Number Placeholder 3"/>
+          <p:cNvSpPr>
+            <a:spLocks noGrp="1"/>
+          </p:cNvSpPr>
+          <p:nvPr>
+            <p:ph type="sldNum" sz="quarter" idx="10"/>
+          </p:nvPr>
+        </p:nvSpPr>
+        <p:spPr/>
+        <p:txBody>
+          <a:bodyPr/>
+          <a:lstStyle/>
+          <a:p>
+            <a:fld id="{F7021451-1387-4CA6-816F-3879F97B5CBC}" type="slidenum">
+              <a:rPr lang="en-US"/>
+              <a:t>25</a:t>
+            </a:fld>
+            <a:endParaRPr lang="en-US"/>
+          </a:p>
+        </p:txBody>
+      </p:sp>
+    </p:spTree>
+    <p:extLst>
+      <p:ext uri="{BB962C8B-B14F-4D97-AF65-F5344CB8AC3E}">
+        <p14:creationId xmlns:p14="http://schemas.microsoft.com/office/powerpoint/2010/main" val="1024086991"/>
+      </p:ext>
+    </p:extLst>
+  </p:cSld>
+  <p:clrMapOvr>
+    <a:masterClrMapping/>
+  </p:clrMapOvr>
+</p:notes>
+</file>
+
 <file path=ppt/notesSlides/notesSlide3.xml><?xml version="1.0" encoding="utf-8"?>
 <p:notes xmlns:a="http://schemas.openxmlformats.org/drawingml/2006/main" xmlns:r="http://schemas.openxmlformats.org/officeDocument/2006/relationships" xmlns:p="http://schemas.openxmlformats.org/presentationml/2006/main">
   <p:cSld>
@@ -1314,12 +2113,7 @@
           <a:p>
             <a:r>
               <a:rPr lang="en-US" dirty="0"/>
-              <a:t>Notas: Pergunta de abertura (do plano de aula). Exibir no projetor o MESMO asset em duas situações: o material completo aberto no Blender (Principled BSDF, todos os nós conectados) e o mesmo asset ainda sem material, cinza, recém-importado na Unity. Deixar 2–3 respostas. Direcionar para a ideia central: a Unity não lê o node setup do Blender — ela só recebe geometria, UV e os arquivos de textura brutos. O trabalho de hoje é reconstruir, dentro do sistema de material da Unity, a mesma lógica de leitura de mapas que já existe no Blender, mais uma camada de UV nova: o lightmap.
-[!FIGURA]
-Objetivo didático: materializar o gancho da aula — o trabalho está guardado nos mapas, mas o motor não herda o material montado no Blender.
-Arquivo sugerido: assets/asset_blender_vs_unity_cinza.webp
-Descrição: dois painéis lado a lado do mesmo asset do kit. À esquerda, rotulado "Blender", o objeto com material completo (Principled BSDF, todos os nós conectados visíveis ao fundo). À direita, rotulado "Unity", o mesmo objeto cinza liso, recém-importado, sem material.
-Como produzir: no Blender, capturar o viewport com o material aplicado e o node editor visível. Na Unity, importar o mesmo FBX sem material e capturar o objeto cinza na cena. Montar lado a lado no Krita com os rótulos "Blender" e "Unity".</a:t>
+              <a:t>Notas: Pergunta de abertura da mini aula (do plano de aula). Deixar 2–3 respostas da turma. Usar as respostas para introduzir a ideia central: uma boa defesa não é mostrar tudo — é uma curadoria do próprio processo. Depois de 16 semanas produzindo, hoje e no próximo encontro os estudantes vão contar a história desse projeto para quem não acompanhou o processo de perto.</a:t>
             </a:r>
             <a:endParaRPr lang="en-US" dirty="0"/>
           </a:p>
@@ -1407,7 +2201,7 @@
           <a:p>
             <a:r>
               <a:rPr lang="en-US" dirty="0"/>
-              <a:t>Notas: Revisão rápida e nota de transição do plano de aula. As Semanas 13–15 resolveram a Unidade IV do lado da produção: menos texturas e texturas mais leves. Hoje o mesmo conteúdo entra na Unity. Isso exige um UV que ainda não foi trabalhado — o UV2 de lightmap — e a reconfiguração dos mapas PBR dentro do sistema de material da Unity (URP), que lê canais de forma diferente do Principled BSDF do Blender. Preparar os quatro tópicos da mini aula: UV2, geração de UV2, materiais na Unity e lightmap bake.</a:t>
+              <a:t>Notas: Nota de transição do plano de aula, citada quase literalmente. Fundamental para reduzir ansiedade: nenhuma novidade técnica hoje, apenas a integração e a comunicação do que já existe.</a:t>
             </a:r>
             <a:endParaRPr lang="en-US" dirty="0"/>
           </a:p>
@@ -1495,7 +2289,7 @@
           <a:p>
             <a:r>
               <a:rPr lang="en-US" dirty="0"/>
-              <a:t>Notas: Tópico 1 da mini aula. O UV1, usado desde a S2, foi otimizado para textura: sobreposição ali é DESEJÁVEL, porque a mesma região de textura é reaproveitada (atlas na S13, tiling na S14). O lightmap registra a luz incidente sobre cada ponto da superfície — se duas regiões compartilham o mesmo espaço de UV, elas vazam luz uma para a outra no bake, mesmo sendo partes fisicamente distintas. Por isso o UV2 é exclusivo para a luz e não pode ter sobreposição, mesmo que o UV1 do mesmo objeto tenha sobreposição intencional. Frase-chave do plano: "UV1 responde 'que pixel aparece aqui?'; UV2 responde 'quanta luz chega neste ponto?'".</a:t>
+              <a:t>Notas: Pré-requisito da semana, listado no plano. Reforçar a ligação direta com a Semana 15: é lá que a fase caminhável foi montada na Unity com lightmap baked — é esse mesmo material que sobe ao "palco" hoje. Também chegam prontos: autoavaliação (Instrumento 2), documento de processo acumulado (moodboard, versões, anotações, checklists — Instrumento 4) e a leitura do Cap. 24 sobre apresentação profissional de assets.</a:t>
             </a:r>
             <a:endParaRPr lang="en-US" dirty="0"/>
           </a:p>
@@ -1583,7 +2377,7 @@
           <a:p>
             <a:r>
               <a:rPr lang="en-US" dirty="0"/>
-              <a:t>Notas: Tópico 1 (continuação) e Possíveis Dificuldades nº 1 do plano — o erro técnico mais comum e mais confuso para quem faz pela primeira vez. Reforçar a estratégia: antes de qualquer bake, inspecionar visualmente o UV2 ilha por ilha e confirmar ausência de sobreposição E padding suficiente. Vazamento de luz é sintoma de UV2 mal gerado (ou objetos muito próximos na cena) — resolver na origem (UV), não compensando com parâmetros de luz.</a:t>
+              <a:t>Notas: Slide de transição de capítulo antes da tabela de pesos. Hoje, pela primeira vez, todos os 10 critérios da rubrica recebem nota formal simultaneamente, incluindo C10 (Participação nas Critiques), que nas CFs anteriores era apenas observado.</a:t>
             </a:r>
             <a:endParaRPr lang="en-US" dirty="0"/>
           </a:p>
@@ -1671,12 +2465,7 @@
           <a:p>
             <a:r>
               <a:rPr lang="en-US" dirty="0"/>
-              <a:t>Notas: Tópico 2 da mini aula. O Blender oferece geração automática de um segundo canal de UV, adequada para lightmap (sem sobreposição, com padding). Esse UV2 é gerado de forma independente do UV1 e não o altera — os dois convivem. Reforçar: o estudante NÃO deve mexer no UV1 que já está pronto e validado. Na maioria dos casos a geração automática do UV2 basta. Preparar a demonstração: mostrar no UV Editor a diferença entre o layout do UV1 e o do UV2.
-[!FIGURA]
-Objetivo didático: contrastar visualmente o layout do UV1 (com possível sobreposição/repetição) e o do UV2 (sem sobreposição, com padding).
-Arquivo sugerido: assets/uv1_vs_uv2_layout.webp
-Descrição: dois quadrados de UV do mesmo asset lado a lado. À esquerda, "UV1" com ilhas grandes, algumas sobrepostas ou repetidas. À direita, "UV2" com todas as ilhas separadas, sem sobreposição, com espaço (padding) visível entre elas.
-Como produzir: no Blender, no UV Editor, capturar o layout do UV1 do asset de demonstração; gerar o segundo canal de UV (lightmap) e capturar o layout do UV2. Montar lado a lado no Krita com os rótulos "UV1 · textura" e "UV2 · lightmap".</a:t>
+              <a:t>Notas: Tabela central da CF5, do plano de aula. C5 (Texturização) tem o maior peso — coerente com ser o núcleo da disciplina. Destacar que C8 (Integração na Unity) recebe nota formal pela primeira vez hoje, e que C10 também recebe nota formal pela primeira e única vez, consolidando o engajamento do estudante em todas as críticas do semestre. Vocês já foram avaliados nesses critérios separadamente ao longo do semestre — hoje é a primeira e única vez em que todos aparecem juntos.</a:t>
             </a:r>
             <a:endParaRPr lang="en-US" dirty="0"/>
           </a:p>
@@ -1764,7 +2553,7 @@
           <a:p>
             <a:r>
               <a:rPr lang="en-US" dirty="0"/>
-              <a:t>Notas: O GitHub Action converte o mermaid em imagem — por isso o diagrama vai no markdown, não na nota. Percorrer o fluxo: os dois canais de UV (UV1 e UV2) são exportados juntos no FBX; na Unity, o material é reconstruído com os mapas já produzidos (Albedo, Normal, ORM); os objetos marcados como Static recebem o lightmap bake; por fim, capturamos os renders. Este é exatamente o percurso da demonstração de 20 min. Erro a antecipar (Possíveis Dificuldades nº 4): esquecer de conferir se o FBX exportou os DOIS canais — sem isso, a Unity gera um lightmap UV automático de baixa qualidade.</a:t>
+              <a:t>Notas: Fórmula de referência do plano de aula. Importante deixar claro que a defesa de hoje tem peso duplo — compõe diretamente o PF (40% da nota final) e fecha o cômputo de CC (20% da nota final) através de C10.</a:t>
             </a:r>
             <a:endParaRPr lang="en-US" dirty="0"/>
           </a:p>
@@ -1852,7 +2641,7 @@
           <a:p>
             <a:r>
               <a:rPr lang="en-US" dirty="0"/>
-              <a:t>Notas: Tópico 3 da mini aula. O shader Lit do URP espera Base Map (Albedo), Normal Map e um slot combinado de Metallic/Smoothness (ou Mask Map, conforme o pipeline). Analogia do plano: é como levar a mesma receita de um forno para outro — os ingredientes (mapas) são os mesmos, mas o forno tem os próprios botões e você precisa saber onde cada um fica. O trabalho técnico e artístico das 15 semanas não muda. Preparar os dois próximos slides: as duas diferenças que mais pegam — Smoothness invertido e a flag do Normal Map.</a:t>
+              <a:t>Notas: Estrutura recomendada dos 10 minutos, do plano de aula — sugestão de sequência, não um roteiro rígido. Frase-chave: "Vocês não precisam explicar cada uma das 16 semanas. Escolham o que for mais representativo do trabalho de vocês — a apresentação é uma escolha editorial, não um relatório completo."</a:t>
             </a:r>
             <a:endParaRPr lang="en-US" dirty="0"/>
           </a:p>
@@ -2513,9 +3302,360 @@
 </p:sld>
 </file>
 
+<file path=ppt/slides/slide17.xml><?xml version="1.0" encoding="utf-8"?>
+<p:sld xmlns:a="http://schemas.openxmlformats.org/drawingml/2006/main" xmlns:r="http://schemas.openxmlformats.org/officeDocument/2006/relationships" xmlns:p="http://schemas.openxmlformats.org/presentationml/2006/main">
+  <p:cSld name="Slide 17">
+    <p:bg>
+      <p:bgPr>
+        <a:blipFill dpi="0" rotWithShape="1">
+          <a:blip r:embed="rId1">
+            <a:lum/>
+          </a:blip>
+          <a:srcRect/>
+          <a:stretch>
+            <a:fillRect/>
+          </a:stretch>
+        </a:blipFill>
+        <a:effectLst/>
+      </p:bgPr>
+    </p:bg>
+    <p:spTree>
+      <p:nvGrpSpPr>
+        <p:cNvPr id="1" name=""/>
+        <p:cNvGrpSpPr/>
+        <p:nvPr/>
+      </p:nvGrpSpPr>
+      <p:grpSpPr>
+        <a:xfrm>
+          <a:off x="0" y="0"/>
+          <a:ext cx="0" cy="0"/>
+          <a:chOff x="0" y="0"/>
+          <a:chExt cx="0" cy="0"/>
+        </a:xfrm>
+      </p:grpSpPr>
+    </p:spTree>
+  </p:cSld>
+  <p:clrMapOvr>
+    <a:masterClrMapping/>
+  </p:clrMapOvr>
+</p:sld>
+</file>
+
+<file path=ppt/slides/slide18.xml><?xml version="1.0" encoding="utf-8"?>
+<p:sld xmlns:a="http://schemas.openxmlformats.org/drawingml/2006/main" xmlns:r="http://schemas.openxmlformats.org/officeDocument/2006/relationships" xmlns:p="http://schemas.openxmlformats.org/presentationml/2006/main">
+  <p:cSld name="Slide 18">
+    <p:bg>
+      <p:bgPr>
+        <a:blipFill dpi="0" rotWithShape="1">
+          <a:blip r:embed="rId1">
+            <a:lum/>
+          </a:blip>
+          <a:srcRect/>
+          <a:stretch>
+            <a:fillRect/>
+          </a:stretch>
+        </a:blipFill>
+        <a:effectLst/>
+      </p:bgPr>
+    </p:bg>
+    <p:spTree>
+      <p:nvGrpSpPr>
+        <p:cNvPr id="1" name=""/>
+        <p:cNvGrpSpPr/>
+        <p:nvPr/>
+      </p:nvGrpSpPr>
+      <p:grpSpPr>
+        <a:xfrm>
+          <a:off x="0" y="0"/>
+          <a:ext cx="0" cy="0"/>
+          <a:chOff x="0" y="0"/>
+          <a:chExt cx="0" cy="0"/>
+        </a:xfrm>
+      </p:grpSpPr>
+    </p:spTree>
+  </p:cSld>
+  <p:clrMapOvr>
+    <a:masterClrMapping/>
+  </p:clrMapOvr>
+</p:sld>
+</file>
+
+<file path=ppt/slides/slide19.xml><?xml version="1.0" encoding="utf-8"?>
+<p:sld xmlns:a="http://schemas.openxmlformats.org/drawingml/2006/main" xmlns:r="http://schemas.openxmlformats.org/officeDocument/2006/relationships" xmlns:p="http://schemas.openxmlformats.org/presentationml/2006/main">
+  <p:cSld name="Slide 19">
+    <p:bg>
+      <p:bgPr>
+        <a:blipFill dpi="0" rotWithShape="1">
+          <a:blip r:embed="rId1">
+            <a:lum/>
+          </a:blip>
+          <a:srcRect/>
+          <a:stretch>
+            <a:fillRect/>
+          </a:stretch>
+        </a:blipFill>
+        <a:effectLst/>
+      </p:bgPr>
+    </p:bg>
+    <p:spTree>
+      <p:nvGrpSpPr>
+        <p:cNvPr id="1" name=""/>
+        <p:cNvGrpSpPr/>
+        <p:nvPr/>
+      </p:nvGrpSpPr>
+      <p:grpSpPr>
+        <a:xfrm>
+          <a:off x="0" y="0"/>
+          <a:ext cx="0" cy="0"/>
+          <a:chOff x="0" y="0"/>
+          <a:chExt cx="0" cy="0"/>
+        </a:xfrm>
+      </p:grpSpPr>
+    </p:spTree>
+  </p:cSld>
+  <p:clrMapOvr>
+    <a:masterClrMapping/>
+  </p:clrMapOvr>
+</p:sld>
+</file>
+
 <file path=ppt/slides/slide2.xml><?xml version="1.0" encoding="utf-8"?>
 <p:sld xmlns:a="http://schemas.openxmlformats.org/drawingml/2006/main" xmlns:r="http://schemas.openxmlformats.org/officeDocument/2006/relationships" xmlns:p="http://schemas.openxmlformats.org/presentationml/2006/main">
   <p:cSld name="Slide 2">
+    <p:bg>
+      <p:bgPr>
+        <a:blipFill dpi="0" rotWithShape="1">
+          <a:blip r:embed="rId1">
+            <a:lum/>
+          </a:blip>
+          <a:srcRect/>
+          <a:stretch>
+            <a:fillRect/>
+          </a:stretch>
+        </a:blipFill>
+        <a:effectLst/>
+      </p:bgPr>
+    </p:bg>
+    <p:spTree>
+      <p:nvGrpSpPr>
+        <p:cNvPr id="1" name=""/>
+        <p:cNvGrpSpPr/>
+        <p:nvPr/>
+      </p:nvGrpSpPr>
+      <p:grpSpPr>
+        <a:xfrm>
+          <a:off x="0" y="0"/>
+          <a:ext cx="0" cy="0"/>
+          <a:chOff x="0" y="0"/>
+          <a:chExt cx="0" cy="0"/>
+        </a:xfrm>
+      </p:grpSpPr>
+    </p:spTree>
+  </p:cSld>
+  <p:clrMapOvr>
+    <a:masterClrMapping/>
+  </p:clrMapOvr>
+</p:sld>
+</file>
+
+<file path=ppt/slides/slide20.xml><?xml version="1.0" encoding="utf-8"?>
+<p:sld xmlns:a="http://schemas.openxmlformats.org/drawingml/2006/main" xmlns:r="http://schemas.openxmlformats.org/officeDocument/2006/relationships" xmlns:p="http://schemas.openxmlformats.org/presentationml/2006/main">
+  <p:cSld name="Slide 20">
+    <p:bg>
+      <p:bgPr>
+        <a:blipFill dpi="0" rotWithShape="1">
+          <a:blip r:embed="rId1">
+            <a:lum/>
+          </a:blip>
+          <a:srcRect/>
+          <a:stretch>
+            <a:fillRect/>
+          </a:stretch>
+        </a:blipFill>
+        <a:effectLst/>
+      </p:bgPr>
+    </p:bg>
+    <p:spTree>
+      <p:nvGrpSpPr>
+        <p:cNvPr id="1" name=""/>
+        <p:cNvGrpSpPr/>
+        <p:nvPr/>
+      </p:nvGrpSpPr>
+      <p:grpSpPr>
+        <a:xfrm>
+          <a:off x="0" y="0"/>
+          <a:ext cx="0" cy="0"/>
+          <a:chOff x="0" y="0"/>
+          <a:chExt cx="0" cy="0"/>
+        </a:xfrm>
+      </p:grpSpPr>
+    </p:spTree>
+  </p:cSld>
+  <p:clrMapOvr>
+    <a:masterClrMapping/>
+  </p:clrMapOvr>
+</p:sld>
+</file>
+
+<file path=ppt/slides/slide21.xml><?xml version="1.0" encoding="utf-8"?>
+<p:sld xmlns:a="http://schemas.openxmlformats.org/drawingml/2006/main" xmlns:r="http://schemas.openxmlformats.org/officeDocument/2006/relationships" xmlns:p="http://schemas.openxmlformats.org/presentationml/2006/main">
+  <p:cSld name="Slide 21">
+    <p:bg>
+      <p:bgPr>
+        <a:blipFill dpi="0" rotWithShape="1">
+          <a:blip r:embed="rId1">
+            <a:lum/>
+          </a:blip>
+          <a:srcRect/>
+          <a:stretch>
+            <a:fillRect/>
+          </a:stretch>
+        </a:blipFill>
+        <a:effectLst/>
+      </p:bgPr>
+    </p:bg>
+    <p:spTree>
+      <p:nvGrpSpPr>
+        <p:cNvPr id="1" name=""/>
+        <p:cNvGrpSpPr/>
+        <p:nvPr/>
+      </p:nvGrpSpPr>
+      <p:grpSpPr>
+        <a:xfrm>
+          <a:off x="0" y="0"/>
+          <a:ext cx="0" cy="0"/>
+          <a:chOff x="0" y="0"/>
+          <a:chExt cx="0" cy="0"/>
+        </a:xfrm>
+      </p:grpSpPr>
+    </p:spTree>
+  </p:cSld>
+  <p:clrMapOvr>
+    <a:masterClrMapping/>
+  </p:clrMapOvr>
+</p:sld>
+</file>
+
+<file path=ppt/slides/slide22.xml><?xml version="1.0" encoding="utf-8"?>
+<p:sld xmlns:a="http://schemas.openxmlformats.org/drawingml/2006/main" xmlns:r="http://schemas.openxmlformats.org/officeDocument/2006/relationships" xmlns:p="http://schemas.openxmlformats.org/presentationml/2006/main">
+  <p:cSld name="Slide 22">
+    <p:bg>
+      <p:bgPr>
+        <a:blipFill dpi="0" rotWithShape="1">
+          <a:blip r:embed="rId1">
+            <a:lum/>
+          </a:blip>
+          <a:srcRect/>
+          <a:stretch>
+            <a:fillRect/>
+          </a:stretch>
+        </a:blipFill>
+        <a:effectLst/>
+      </p:bgPr>
+    </p:bg>
+    <p:spTree>
+      <p:nvGrpSpPr>
+        <p:cNvPr id="1" name=""/>
+        <p:cNvGrpSpPr/>
+        <p:nvPr/>
+      </p:nvGrpSpPr>
+      <p:grpSpPr>
+        <a:xfrm>
+          <a:off x="0" y="0"/>
+          <a:ext cx="0" cy="0"/>
+          <a:chOff x="0" y="0"/>
+          <a:chExt cx="0" cy="0"/>
+        </a:xfrm>
+      </p:grpSpPr>
+    </p:spTree>
+  </p:cSld>
+  <p:clrMapOvr>
+    <a:masterClrMapping/>
+  </p:clrMapOvr>
+</p:sld>
+</file>
+
+<file path=ppt/slides/slide23.xml><?xml version="1.0" encoding="utf-8"?>
+<p:sld xmlns:a="http://schemas.openxmlformats.org/drawingml/2006/main" xmlns:r="http://schemas.openxmlformats.org/officeDocument/2006/relationships" xmlns:p="http://schemas.openxmlformats.org/presentationml/2006/main">
+  <p:cSld name="Slide 23">
+    <p:bg>
+      <p:bgPr>
+        <a:blipFill dpi="0" rotWithShape="1">
+          <a:blip r:embed="rId1">
+            <a:lum/>
+          </a:blip>
+          <a:srcRect/>
+          <a:stretch>
+            <a:fillRect/>
+          </a:stretch>
+        </a:blipFill>
+        <a:effectLst/>
+      </p:bgPr>
+    </p:bg>
+    <p:spTree>
+      <p:nvGrpSpPr>
+        <p:cNvPr id="1" name=""/>
+        <p:cNvGrpSpPr/>
+        <p:nvPr/>
+      </p:nvGrpSpPr>
+      <p:grpSpPr>
+        <a:xfrm>
+          <a:off x="0" y="0"/>
+          <a:ext cx="0" cy="0"/>
+          <a:chOff x="0" y="0"/>
+          <a:chExt cx="0" cy="0"/>
+        </a:xfrm>
+      </p:grpSpPr>
+    </p:spTree>
+  </p:cSld>
+  <p:clrMapOvr>
+    <a:masterClrMapping/>
+  </p:clrMapOvr>
+</p:sld>
+</file>
+
+<file path=ppt/slides/slide24.xml><?xml version="1.0" encoding="utf-8"?>
+<p:sld xmlns:a="http://schemas.openxmlformats.org/drawingml/2006/main" xmlns:r="http://schemas.openxmlformats.org/officeDocument/2006/relationships" xmlns:p="http://schemas.openxmlformats.org/presentationml/2006/main">
+  <p:cSld name="Slide 24">
+    <p:bg>
+      <p:bgPr>
+        <a:blipFill dpi="0" rotWithShape="1">
+          <a:blip r:embed="rId1">
+            <a:lum/>
+          </a:blip>
+          <a:srcRect/>
+          <a:stretch>
+            <a:fillRect/>
+          </a:stretch>
+        </a:blipFill>
+        <a:effectLst/>
+      </p:bgPr>
+    </p:bg>
+    <p:spTree>
+      <p:nvGrpSpPr>
+        <p:cNvPr id="1" name=""/>
+        <p:cNvGrpSpPr/>
+        <p:nvPr/>
+      </p:nvGrpSpPr>
+      <p:grpSpPr>
+        <a:xfrm>
+          <a:off x="0" y="0"/>
+          <a:ext cx="0" cy="0"/>
+          <a:chOff x="0" y="0"/>
+          <a:chExt cx="0" cy="0"/>
+        </a:xfrm>
+      </p:grpSpPr>
+    </p:spTree>
+  </p:cSld>
+  <p:clrMapOvr>
+    <a:masterClrMapping/>
+  </p:clrMapOvr>
+</p:sld>
+</file>
+
+<file path=ppt/slides/slide25.xml><?xml version="1.0" encoding="utf-8"?>
+<p:sld xmlns:a="http://schemas.openxmlformats.org/drawingml/2006/main" xmlns:r="http://schemas.openxmlformats.org/officeDocument/2006/relationships" xmlns:p="http://schemas.openxmlformats.org/presentationml/2006/main">
+  <p:cSld name="Slide 25">
     <p:bg>
       <p:bgPr>
         <a:blipFill dpi="0" rotWithShape="1">
